--- a/output/archive/QuenverellData/marketing/capabilities/2025/Copy of quenverell-capabilities-bioinformatics-2025.pptx
+++ b/output/archive/QuenverellData/marketing/capabilities/2025/Copy of quenverell-capabilities-bioinformatics-2025.pptx
@@ -726,6 +726,76 @@
           <a:p>
             <a:r>
               <a:t>Clients in regulated settings care about this slide more than the science.</a:t>
+            </a:r>
+          </a:p>
+        </p:txBody>
+      </p:sp>
+      <p:sp>
+        <p:nvSpPr>
+          <p:cNvPr id="4" name="Slide Number Placeholder 3"/>
+          <p:cNvSpPr>
+            <a:spLocks noGrp="1"/>
+          </p:cNvSpPr>
+          <p:nvPr>
+            <p:ph type="sldNum" idx="5" sz="quarter"/>
+          </p:nvPr>
+        </p:nvSpPr>
+        <p:spPr/>
+      </p:sp>
+    </p:spTree>
+  </p:cSld>
+  <p:clrMapOvr>
+    <a:masterClrMapping/>
+  </p:clrMapOvr>
+</p:notes>
+</file>
+
+<file path=ppt/notesSlides/notesSlide5.xml><?xml version="1.0" encoding="utf-8"?>
+<p:notes xmlns:a="http://schemas.openxmlformats.org/drawingml/2006/main" xmlns:p="http://schemas.openxmlformats.org/presentationml/2006/main" xmlns:r="http://schemas.openxmlformats.org/officeDocument/2006/relationships">
+  <p:cSld>
+    <p:spTree>
+      <p:nvGrpSpPr>
+        <p:cNvPr id="1" name=""/>
+        <p:cNvGrpSpPr/>
+        <p:nvPr/>
+      </p:nvGrpSpPr>
+      <p:grpSpPr>
+        <a:xfrm>
+          <a:off x="0" y="0"/>
+          <a:ext cx="0" cy="0"/>
+          <a:chOff x="0" y="0"/>
+          <a:chExt cx="0" cy="0"/>
+        </a:xfrm>
+      </p:grpSpPr>
+      <p:sp>
+        <p:nvSpPr>
+          <p:cNvPr id="2" name="Slide Image Placeholder 1"/>
+          <p:cNvSpPr>
+            <a:spLocks noGrp="1"/>
+          </p:cNvSpPr>
+          <p:nvPr>
+            <p:ph type="sldImg" idx="2"/>
+          </p:nvPr>
+        </p:nvSpPr>
+        <p:spPr/>
+      </p:sp>
+      <p:sp>
+        <p:nvSpPr>
+          <p:cNvPr id="3" name="Notes Placeholder 2"/>
+          <p:cNvSpPr>
+            <a:spLocks noGrp="1"/>
+          </p:cNvSpPr>
+          <p:nvPr>
+            <p:ph type="body" idx="3" sz="quarter"/>
+          </p:nvPr>
+        </p:nvSpPr>
+        <p:spPr/>
+        <p:txBody>
+          <a:bodyPr/>
+          <a:lstStyle/>
+          <a:p>
+            <a:r>
+              <a:t>Client anonymised; details on request with the client's permission.</a:t>
             </a:r>
           </a:p>
         </p:txBody>
@@ -4342,7 +4412,7 @@
                 </a:solidFill>
                 <a:latin typeface="Arial"/>
               </a:rPr>
-              <a:t>Case study</a:t>
+              <a:t>Case study: target prioritisation for an inflammation programme</a:t>
             </a:r>
           </a:p>
         </p:txBody>
@@ -4374,7 +4444,7 @@
               <a:rPr sz="2000">
                 <a:latin typeface="Arial"/>
               </a:rPr>
-              <a:t>[TBC - pick an oncology example]</a:t>
+              <a:t>Question: which candidate genes justify building a cell assay?</a:t>
             </a:r>
           </a:p>
           <a:p>
@@ -4383,7 +4453,25 @@
               <a:rPr sz="2000">
                 <a:latin typeface="Arial"/>
               </a:rPr>
-              <a:t>Ask Fiona for the anonymised version</a:t>
+              <a:t>Combined patient-tissue RNA-seq, genetic evidence and pathway context to prioritise candidates</a:t>
+            </a:r>
+          </a:p>
+          <a:p>
+            <a:pPr/>
+            <a:r>
+              <a:rPr sz="2000">
+                <a:latin typeface="Arial"/>
+              </a:rPr>
+              <a:t>Flagged candidates with broad tissue expression as safety risks</a:t>
+            </a:r>
+          </a:p>
+          <a:p>
+            <a:pPr/>
+            <a:r>
+              <a:rPr sz="2000">
+                <a:latin typeface="Arial"/>
+              </a:rPr>
+              <a:t>The client commissioned follow-up cell assays with Brindlewythe for the top-ranked targets</a:t>
             </a:r>
           </a:p>
         </p:txBody>
@@ -5274,7 +5362,7 @@
               <a:rPr sz="1500">
                 <a:latin typeface="Arial"/>
               </a:rPr>
-              <a:t>Target validation: test whether the target is expressed in the right tissue, cell type and patient subgroup</a:t>
+              <a:t>Target validation support: check expression in the relevant tissues, cell types and patient subgroups to guide functional testing</a:t>
             </a:r>
           </a:p>
           <a:p>
@@ -5292,7 +5380,7 @@
               <a:rPr sz="1500">
                 <a:latin typeface="Arial"/>
               </a:rPr>
-              <a:t>Biomarkers and stratification: find the patients most likley to respond, e.g. by tumour subtype</a:t>
+              <a:t>Biomarker candidates: propose response signatures for the patients most likley to respond, e.g. by tumour subtype</a:t>
             </a:r>
           </a:p>
           <a:p>
